--- a/neurons_and_neural_communication/neurons_and_neural_communication_lecture_3.pptx
+++ b/neurons_and_neural_communication/neurons_and_neural_communication_lecture_3.pptx
@@ -5723,7 +5723,7 @@
                 </a:solidFill>
                 <a:latin typeface="Calibri"/>
               </a:rPr>
-              <a:t>Lecture 3.3 — The Biology of Neurons, including Metabolism</a:t>
+              <a:t>Lecture 3.3 — The Biology of Neurons</a:t>
             </a:r>
           </a:p>
         </p:txBody>
